--- a/docs/presentaciones/classes/clase-097-clustering-agglomerative-birch-mean-shift-affinity-propagation-spectra-presentacion.pptx
+++ b/docs/presentaciones/classes/clase-097-clustering-agglomerative-birch-mean-shift-affinity-propagation-spectra-presentacion.pptx
@@ -4911,7 +4911,7 @@
                 </a:solidFill>
                 <a:latin typeface="Segoe UI"/>
               </a:rPr>
-              <a:t>Primer bloque ejecutable del notebook.</a:t>
+              <a:t>scipy.cluster.hierarchy.linkage construye la jerarquía bottom-up; cortarla a una altura da los clusters.</a:t>
             </a:r>
           </a:p>
         </p:txBody>
@@ -4998,7 +4998,330 @@
                 </a:solidFill>
                 <a:latin typeface="Courier New"/>
               </a:rPr>
-              <a:t># Imports y configuración inicial</a:t>
+              <a:t>import numpy as np</a:t>
+            </a:r>
+          </a:p>
+          <a:p>
+            <a:pPr>
+              <a:defRPr sz="1200" b="0">
+                <a:solidFill>
+                  <a:srgbClr val="F8FAFC"/>
+                </a:solidFill>
+                <a:latin typeface="Courier New"/>
+              </a:defRPr>
+            </a:pPr>
+            <a:r>
+              <a:rPr sz="1200" b="0">
+                <a:solidFill>
+                  <a:srgbClr val="F8FAFC"/>
+                </a:solidFill>
+                <a:latin typeface="Courier New"/>
+              </a:rPr>
+              <a:t>import matplotlib.pyplot as plt</a:t>
+            </a:r>
+          </a:p>
+          <a:p>
+            <a:pPr>
+              <a:defRPr sz="1200" b="0">
+                <a:solidFill>
+                  <a:srgbClr val="F8FAFC"/>
+                </a:solidFill>
+                <a:latin typeface="Courier New"/>
+              </a:defRPr>
+            </a:pPr>
+            <a:r>
+              <a:rPr sz="1200" b="0">
+                <a:solidFill>
+                  <a:srgbClr val="F8FAFC"/>
+                </a:solidFill>
+                <a:latin typeface="Courier New"/>
+              </a:rPr>
+              <a:t>from scipy.cluster.hierarchy import linkage, dendrogram, fcluster</a:t>
+            </a:r>
+          </a:p>
+          <a:p>
+            <a:pPr>
+              <a:defRPr sz="1200" b="0">
+                <a:solidFill>
+                  <a:srgbClr val="F8FAFC"/>
+                </a:solidFill>
+                <a:latin typeface="Courier New"/>
+              </a:defRPr>
+            </a:pPr>
+            <a:r>
+              <a:rPr sz="1200" b="0">
+                <a:solidFill>
+                  <a:srgbClr val="F8FAFC"/>
+                </a:solidFill>
+                <a:latin typeface="Courier New"/>
+              </a:rPr>
+              <a:t>from sklearn.datasets import make_blobs</a:t>
+            </a:r>
+          </a:p>
+          <a:p>
+            <a:pPr>
+              <a:defRPr sz="1200" b="0">
+                <a:solidFill>
+                  <a:srgbClr val="F8FAFC"/>
+                </a:solidFill>
+                <a:latin typeface="Courier New"/>
+              </a:defRPr>
+            </a:pPr>
+            <a:r>
+              <a:rPr sz="1200" b="0">
+                <a:solidFill>
+                  <a:srgbClr val="F8FAFC"/>
+                </a:solidFill>
+                <a:latin typeface="Courier New"/>
+              </a:rPr>
+              <a:t> </a:t>
+            </a:r>
+          </a:p>
+          <a:p>
+            <a:pPr>
+              <a:defRPr sz="1200" b="0">
+                <a:solidFill>
+                  <a:srgbClr val="F8FAFC"/>
+                </a:solidFill>
+                <a:latin typeface="Courier New"/>
+              </a:defRPr>
+            </a:pPr>
+            <a:r>
+              <a:rPr sz="1200" b="0">
+                <a:solidFill>
+                  <a:srgbClr val="F8FAFC"/>
+                </a:solidFill>
+                <a:latin typeface="Courier New"/>
+              </a:rPr>
+              <a:t>np.random.seed(42)</a:t>
+            </a:r>
+          </a:p>
+          <a:p>
+            <a:pPr>
+              <a:defRPr sz="1200" b="0">
+                <a:solidFill>
+                  <a:srgbClr val="F8FAFC"/>
+                </a:solidFill>
+                <a:latin typeface="Courier New"/>
+              </a:defRPr>
+            </a:pPr>
+            <a:r>
+              <a:rPr sz="1200" b="0">
+                <a:solidFill>
+                  <a:srgbClr val="F8FAFC"/>
+                </a:solidFill>
+                <a:latin typeface="Courier New"/>
+              </a:rPr>
+              <a:t>Xs, _ = make_blobs(n_samples=50, centers=4, cluster_std=0.6, random_state=42)</a:t>
+            </a:r>
+          </a:p>
+          <a:p>
+            <a:pPr>
+              <a:defRPr sz="1200" b="0">
+                <a:solidFill>
+                  <a:srgbClr val="F8FAFC"/>
+                </a:solidFill>
+                <a:latin typeface="Courier New"/>
+              </a:defRPr>
+            </a:pPr>
+            <a:r>
+              <a:rPr sz="1200" b="0">
+                <a:solidFill>
+                  <a:srgbClr val="F8FAFC"/>
+                </a:solidFill>
+                <a:latin typeface="Courier New"/>
+              </a:rPr>
+              <a:t> </a:t>
+            </a:r>
+          </a:p>
+          <a:p>
+            <a:pPr>
+              <a:defRPr sz="1200" b="0">
+                <a:solidFill>
+                  <a:srgbClr val="F8FAFC"/>
+                </a:solidFill>
+                <a:latin typeface="Courier New"/>
+              </a:defRPr>
+            </a:pPr>
+            <a:r>
+              <a:rPr sz="1200" b="0">
+                <a:solidFill>
+                  <a:srgbClr val="F8FAFC"/>
+                </a:solidFill>
+                <a:latin typeface="Courier New"/>
+              </a:rPr>
+              <a:t>Z = linkage(Xs, method="ward")</a:t>
+            </a:r>
+          </a:p>
+          <a:p>
+            <a:pPr>
+              <a:defRPr sz="1200" b="0">
+                <a:solidFill>
+                  <a:srgbClr val="F8FAFC"/>
+                </a:solidFill>
+                <a:latin typeface="Courier New"/>
+              </a:defRPr>
+            </a:pPr>
+            <a:r>
+              <a:rPr sz="1200" b="0">
+                <a:solidFill>
+                  <a:srgbClr val="F8FAFC"/>
+                </a:solidFill>
+                <a:latin typeface="Courier New"/>
+              </a:rPr>
+              <a:t>labels_cut = fcluster(Z, t=4, criterion="maxclust")</a:t>
+            </a:r>
+          </a:p>
+          <a:p>
+            <a:pPr>
+              <a:defRPr sz="1200" b="0">
+                <a:solidFill>
+                  <a:srgbClr val="F8FAFC"/>
+                </a:solidFill>
+                <a:latin typeface="Courier New"/>
+              </a:defRPr>
+            </a:pPr>
+            <a:r>
+              <a:rPr sz="1200" b="0">
+                <a:solidFill>
+                  <a:srgbClr val="F8FAFC"/>
+                </a:solidFill>
+                <a:latin typeface="Courier New"/>
+              </a:rPr>
+              <a:t>print("clusters tras cortar a 4:", np.unique(labels_cut))</a:t>
+            </a:r>
+          </a:p>
+          <a:p>
+            <a:pPr>
+              <a:defRPr sz="1200" b="0">
+                <a:solidFill>
+                  <a:srgbClr val="F8FAFC"/>
+                </a:solidFill>
+                <a:latin typeface="Courier New"/>
+              </a:defRPr>
+            </a:pPr>
+            <a:r>
+              <a:rPr sz="1200" b="0">
+                <a:solidFill>
+                  <a:srgbClr val="F8FAFC"/>
+                </a:solidFill>
+                <a:latin typeface="Courier New"/>
+              </a:rPr>
+              <a:t>assert len(np.unique(labels_cut)) == 4</a:t>
+            </a:r>
+          </a:p>
+          <a:p>
+            <a:pPr>
+              <a:defRPr sz="1200" b="0">
+                <a:solidFill>
+                  <a:srgbClr val="F8FAFC"/>
+                </a:solidFill>
+                <a:latin typeface="Courier New"/>
+              </a:defRPr>
+            </a:pPr>
+            <a:r>
+              <a:rPr sz="1200" b="0">
+                <a:solidFill>
+                  <a:srgbClr val="F8FAFC"/>
+                </a:solidFill>
+                <a:latin typeface="Courier New"/>
+              </a:rPr>
+              <a:t> </a:t>
+            </a:r>
+          </a:p>
+          <a:p>
+            <a:pPr>
+              <a:defRPr sz="1200" b="0">
+                <a:solidFill>
+                  <a:srgbClr val="F8FAFC"/>
+                </a:solidFill>
+                <a:latin typeface="Courier New"/>
+              </a:defRPr>
+            </a:pPr>
+            <a:r>
+              <a:rPr sz="1200" b="0">
+                <a:solidFill>
+                  <a:srgbClr val="F8FAFC"/>
+                </a:solidFill>
+                <a:latin typeface="Courier New"/>
+              </a:rPr>
+              <a:t>plt.figure(figsize=(9, 4))</a:t>
+            </a:r>
+          </a:p>
+          <a:p>
+            <a:pPr>
+              <a:defRPr sz="1200" b="0">
+                <a:solidFill>
+                  <a:srgbClr val="F8FAFC"/>
+                </a:solidFill>
+                <a:latin typeface="Courier New"/>
+              </a:defRPr>
+            </a:pPr>
+            <a:r>
+              <a:rPr sz="1200" b="0">
+                <a:solidFill>
+                  <a:srgbClr val="F8FAFC"/>
+                </a:solidFill>
+                <a:latin typeface="Courier New"/>
+              </a:rPr>
+              <a:t>dendrogram(Z, truncate_mode="lastp", p=20)</a:t>
+            </a:r>
+          </a:p>
+          <a:p>
+            <a:pPr>
+              <a:defRPr sz="1200" b="0">
+                <a:solidFill>
+                  <a:srgbClr val="F8FAFC"/>
+                </a:solidFill>
+                <a:latin typeface="Courier New"/>
+              </a:defRPr>
+            </a:pPr>
+            <a:r>
+              <a:rPr sz="1200" b="0">
+                <a:solidFill>
+                  <a:srgbClr val="F8FAFC"/>
+                </a:solidFill>
+                <a:latin typeface="Courier New"/>
+              </a:rPr>
+              <a:t>plt.title("Dendrograma (ward linkage)")</a:t>
+            </a:r>
+          </a:p>
+          <a:p>
+            <a:pPr>
+              <a:defRPr sz="1200" b="0">
+                <a:solidFill>
+                  <a:srgbClr val="F8FAFC"/>
+                </a:solidFill>
+                <a:latin typeface="Courier New"/>
+              </a:defRPr>
+            </a:pPr>
+            <a:r>
+              <a:rPr sz="1200" b="0">
+                <a:solidFill>
+                  <a:srgbClr val="F8FAFC"/>
+                </a:solidFill>
+                <a:latin typeface="Courier New"/>
+              </a:rPr>
+              <a:t>plt.xlabel("muestras"); plt.ylabel("distancia de fusion")</a:t>
+            </a:r>
+          </a:p>
+          <a:p>
+            <a:pPr>
+              <a:defRPr sz="1200" b="0">
+                <a:solidFill>
+                  <a:srgbClr val="F8FAFC"/>
+                </a:solidFill>
+                <a:latin typeface="Courier New"/>
+              </a:defRPr>
+            </a:pPr>
+            <a:r>
+              <a:rPr sz="1200" b="0">
+                <a:solidFill>
+                  <a:srgbClr val="F8FAFC"/>
+                </a:solidFill>
+                <a:latin typeface="Courier New"/>
+              </a:rPr>
+              <a:t>plt.tight_layout(); plt.show()</a:t>
             </a:r>
           </a:p>
         </p:txBody>

--- a/docs/presentaciones/classes/clase-097-clustering-agglomerative-birch-mean-shift-affinity-propagation-spectra-presentacion.pptx
+++ b/docs/presentaciones/classes/clase-097-clustering-agglomerative-birch-mean-shift-affinity-propagation-spectra-presentacion.pptx
@@ -3272,7 +3272,7 @@
                 </a:solidFill>
                 <a:latin typeface="Segoe UI"/>
               </a:rPr>
-              <a:t>Parte: 1 — Machine Learning Clásico · Fuente: Géron, cap. 9 § Other Clustering Algorithms.  Duración estimada: 70 min.</a:t>
+              <a:t>Parte: 1 — Machine Learning Clásico · Fuente: Géron, cap. 9 § Other Clustering Algorithms.  Duración estimada: 70 min. · Nivel: Avanzado</a:t>
             </a:r>
           </a:p>
         </p:txBody>
@@ -3581,7 +3581,7 @@
                 </a:solidFill>
                 <a:latin typeface="Segoe UI"/>
               </a:rPr>
-              <a:t>Parte: 1 — Machine Learning Clásico · Fuente: Géron, cap. 9 § Other Clustering Algorithms.  Duración estimada: 70 min.</a:t>
+              <a:t>Parte: 1 — Machine Learning Clásico · Fuente: Géron, cap. 9 § Other Clustering Algorithms.  Duración estimada: 70 min. · Nivel: Avanzado</a:t>
             </a:r>
           </a:p>
         </p:txBody>
